--- a/slides/decks/L01-data.pptx
+++ b/slides/decks/L01-data.pptx
@@ -119,13 +119,13 @@
   <p:extLst>
     <p:ext uri="{521415D9-36F7-43E2-AB2F-B90AF26B5E84}">
       <p14:sectionLst xmlns:p14="http://schemas.microsoft.com/office/powerpoint/2010/main">
-        <p14:section name="开场" id="{aa375072-0c5b-4ead-04d4-539151441bac}">
+        <p14:section name="开场" id="{0c63ca19-597d-a9a4-67f0-4800e950e099}">
           <p14:sldIdLst>
             <p14:sldId id="256"/>
             <p14:sldId id="257"/>
           </p14:sldIdLst>
         </p14:section>
-        <p14:section name="讲解" id="{30413ef3-7d21-1019-1165-40821350ebd8}">
+        <p14:section name="讲解" id="{bc15fe97-1079-9931-5ba4-a6d5aa9b59f3}">
           <p14:sldIdLst>
             <p14:sldId id="258"/>
             <p14:sldId id="259"/>
@@ -137,13 +137,13 @@
             <p14:sldId id="265"/>
           </p14:sldIdLst>
         </p14:section>
-        <p14:section name="练习" id="{57c48d26-e302-fcfb-7fee-a4b7a8c4dd98}">
+        <p14:section name="练习" id="{5eb1958a-a31b-948a-d41e-fda35ba86498}">
           <p14:sldIdLst>
             <p14:sldId id="266"/>
             <p14:sldId id="267"/>
           </p14:sldIdLst>
         </p14:section>
-        <p14:section name="收束" id="{c092b7a1-ea83-06ef-5700-536592fcaea0}">
+        <p14:section name="收束" id="{d0059f78-50f2-c325-0c2d-e7d896de497b}">
           <p14:sldIdLst>
             <p14:sldId id="268"/>
           </p14:sldIdLst>
